--- a/モバイル開発実習_数あてゲームプレゼン資料.pptx
+++ b/モバイル開発実習_数あてゲームプレゼン資料.pptx
@@ -11,6 +11,7 @@
     <p:sldId id="259" r:id="rId5"/>
     <p:sldId id="260" r:id="rId6"/>
     <p:sldId id="261" r:id="rId7"/>
+    <p:sldId id="262" r:id="rId8"/>
   </p:sldIdLst>
   <p:sldSz cx="12192000" cy="6858000"/>
   <p:notesSz cx="6858000" cy="9144000"/>
@@ -109,6 +110,11 @@
       </a:defRPr>
     </a:lvl9pPr>
   </p:defaultTextStyle>
+  <p:extLst>
+    <p:ext uri="{EFAFB233-063F-42B5-8137-9DF3F51BA10A}">
+      <p15:sldGuideLst xmlns:p15="http://schemas.microsoft.com/office/powerpoint/2012/main"/>
+    </p:ext>
+  </p:extLst>
 </p:presentation>
 </file>
 
@@ -259,7 +265,7 @@
           <a:p>
             <a:fld id="{68004F82-E079-488E-B351-25DDCF2C8407}" type="datetimeFigureOut">
               <a:rPr kumimoji="1" lang="ja-JP" altLang="en-US" smtClean="0"/>
-              <a:t>2026/1/21</a:t>
+              <a:t>2026/5/13</a:t>
             </a:fld>
             <a:endParaRPr kumimoji="1" lang="ja-JP" altLang="en-US"/>
           </a:p>
@@ -489,7 +495,7 @@
           <a:p>
             <a:fld id="{68004F82-E079-488E-B351-25DDCF2C8407}" type="datetimeFigureOut">
               <a:rPr kumimoji="1" lang="ja-JP" altLang="en-US" smtClean="0"/>
-              <a:t>2026/1/21</a:t>
+              <a:t>2026/5/13</a:t>
             </a:fld>
             <a:endParaRPr kumimoji="1" lang="ja-JP" altLang="en-US"/>
           </a:p>
@@ -729,7 +735,7 @@
           <a:p>
             <a:fld id="{68004F82-E079-488E-B351-25DDCF2C8407}" type="datetimeFigureOut">
               <a:rPr kumimoji="1" lang="ja-JP" altLang="en-US" smtClean="0"/>
-              <a:t>2026/1/21</a:t>
+              <a:t>2026/5/13</a:t>
             </a:fld>
             <a:endParaRPr kumimoji="1" lang="ja-JP" altLang="en-US"/>
           </a:p>
@@ -959,7 +965,7 @@
           <a:p>
             <a:fld id="{68004F82-E079-488E-B351-25DDCF2C8407}" type="datetimeFigureOut">
               <a:rPr kumimoji="1" lang="ja-JP" altLang="en-US" smtClean="0"/>
-              <a:t>2026/1/21</a:t>
+              <a:t>2026/5/13</a:t>
             </a:fld>
             <a:endParaRPr kumimoji="1" lang="ja-JP" altLang="en-US"/>
           </a:p>
@@ -1234,7 +1240,7 @@
           <a:p>
             <a:fld id="{68004F82-E079-488E-B351-25DDCF2C8407}" type="datetimeFigureOut">
               <a:rPr kumimoji="1" lang="ja-JP" altLang="en-US" smtClean="0"/>
-              <a:t>2026/1/21</a:t>
+              <a:t>2026/5/13</a:t>
             </a:fld>
             <a:endParaRPr kumimoji="1" lang="ja-JP" altLang="en-US"/>
           </a:p>
@@ -1563,7 +1569,7 @@
           <a:p>
             <a:fld id="{68004F82-E079-488E-B351-25DDCF2C8407}" type="datetimeFigureOut">
               <a:rPr kumimoji="1" lang="ja-JP" altLang="en-US" smtClean="0"/>
-              <a:t>2026/1/21</a:t>
+              <a:t>2026/5/13</a:t>
             </a:fld>
             <a:endParaRPr kumimoji="1" lang="ja-JP" altLang="en-US"/>
           </a:p>
@@ -2039,7 +2045,7 @@
           <a:p>
             <a:fld id="{68004F82-E079-488E-B351-25DDCF2C8407}" type="datetimeFigureOut">
               <a:rPr kumimoji="1" lang="ja-JP" altLang="en-US" smtClean="0"/>
-              <a:t>2026/1/21</a:t>
+              <a:t>2026/5/13</a:t>
             </a:fld>
             <a:endParaRPr kumimoji="1" lang="ja-JP" altLang="en-US"/>
           </a:p>
@@ -2180,7 +2186,7 @@
           <a:p>
             <a:fld id="{68004F82-E079-488E-B351-25DDCF2C8407}" type="datetimeFigureOut">
               <a:rPr kumimoji="1" lang="ja-JP" altLang="en-US" smtClean="0"/>
-              <a:t>2026/1/21</a:t>
+              <a:t>2026/5/13</a:t>
             </a:fld>
             <a:endParaRPr kumimoji="1" lang="ja-JP" altLang="en-US"/>
           </a:p>
@@ -2293,7 +2299,7 @@
           <a:p>
             <a:fld id="{68004F82-E079-488E-B351-25DDCF2C8407}" type="datetimeFigureOut">
               <a:rPr kumimoji="1" lang="ja-JP" altLang="en-US" smtClean="0"/>
-              <a:t>2026/1/21</a:t>
+              <a:t>2026/5/13</a:t>
             </a:fld>
             <a:endParaRPr kumimoji="1" lang="ja-JP" altLang="en-US"/>
           </a:p>
@@ -2636,7 +2642,7 @@
           <a:p>
             <a:fld id="{68004F82-E079-488E-B351-25DDCF2C8407}" type="datetimeFigureOut">
               <a:rPr kumimoji="1" lang="ja-JP" altLang="en-US" smtClean="0"/>
-              <a:t>2026/1/21</a:t>
+              <a:t>2026/5/13</a:t>
             </a:fld>
             <a:endParaRPr kumimoji="1" lang="ja-JP" altLang="en-US"/>
           </a:p>
@@ -2924,7 +2930,7 @@
           <a:p>
             <a:fld id="{68004F82-E079-488E-B351-25DDCF2C8407}" type="datetimeFigureOut">
               <a:rPr kumimoji="1" lang="ja-JP" altLang="en-US" smtClean="0"/>
-              <a:t>2026/1/21</a:t>
+              <a:t>2026/5/13</a:t>
             </a:fld>
             <a:endParaRPr kumimoji="1" lang="ja-JP" altLang="en-US"/>
           </a:p>
@@ -3197,7 +3203,7 @@
           <a:p>
             <a:fld id="{68004F82-E079-488E-B351-25DDCF2C8407}" type="datetimeFigureOut">
               <a:rPr kumimoji="1" lang="ja-JP" altLang="en-US" smtClean="0"/>
-              <a:t>2026/1/21</a:t>
+              <a:t>2026/5/13</a:t>
             </a:fld>
             <a:endParaRPr kumimoji="1" lang="ja-JP" altLang="en-US"/>
           </a:p>
@@ -4290,6 +4296,143 @@
     <p:extLst>
       <p:ext uri="{BB962C8B-B14F-4D97-AF65-F5344CB8AC3E}">
         <p14:creationId xmlns:p14="http://schemas.microsoft.com/office/powerpoint/2010/main" val="2478803746"/>
+      </p:ext>
+    </p:extLst>
+  </p:cSld>
+  <p:clrMapOvr>
+    <a:masterClrMapping/>
+  </p:clrMapOvr>
+</p:sld>
+</file>
+
+<file path=ppt/slides/slide7.xml><?xml version="1.0" encoding="utf-8"?>
+<p:sld xmlns:a="http://schemas.openxmlformats.org/drawingml/2006/main" xmlns:r="http://schemas.openxmlformats.org/officeDocument/2006/relationships" xmlns:p="http://schemas.openxmlformats.org/presentationml/2006/main">
+  <p:cSld>
+    <p:spTree>
+      <p:nvGrpSpPr>
+        <p:cNvPr id="1" name=""/>
+        <p:cNvGrpSpPr/>
+        <p:nvPr/>
+      </p:nvGrpSpPr>
+      <p:grpSpPr>
+        <a:xfrm>
+          <a:off x="0" y="0"/>
+          <a:ext cx="0" cy="0"/>
+          <a:chOff x="0" y="0"/>
+          <a:chExt cx="0" cy="0"/>
+        </a:xfrm>
+      </p:grpSpPr>
+      <p:sp>
+        <p:nvSpPr>
+          <p:cNvPr id="2" name="タイトル 1">
+            <a:extLst>
+              <a:ext uri="{FF2B5EF4-FFF2-40B4-BE49-F238E27FC236}">
+                <a16:creationId xmlns:a16="http://schemas.microsoft.com/office/drawing/2014/main" id="{921FA4A6-C01B-128F-3C04-43675391D6C3}"/>
+              </a:ext>
+            </a:extLst>
+          </p:cNvPr>
+          <p:cNvSpPr>
+            <a:spLocks noGrp="1"/>
+          </p:cNvSpPr>
+          <p:nvPr>
+            <p:ph type="title"/>
+          </p:nvPr>
+        </p:nvSpPr>
+        <p:spPr/>
+        <p:txBody>
+          <a:bodyPr>
+            <a:normAutofit/>
+          </a:bodyPr>
+          <a:lstStyle/>
+          <a:p>
+            <a:r>
+              <a:rPr kumimoji="1" lang="en-US" altLang="ja-JP" sz="3600" dirty="0"/>
+              <a:t>2026</a:t>
+            </a:r>
+            <a:r>
+              <a:rPr kumimoji="1" lang="ja-JP" altLang="en-US" sz="3600" dirty="0"/>
+              <a:t>　前期モバイルアプリ実習　実装すること</a:t>
+            </a:r>
+          </a:p>
+        </p:txBody>
+      </p:sp>
+      <p:sp>
+        <p:nvSpPr>
+          <p:cNvPr id="3" name="コンテンツ プレースホルダー 2">
+            <a:extLst>
+              <a:ext uri="{FF2B5EF4-FFF2-40B4-BE49-F238E27FC236}">
+                <a16:creationId xmlns:a16="http://schemas.microsoft.com/office/drawing/2014/main" id="{488B2D0E-5089-7D1C-4DD6-85014DFA65A6}"/>
+              </a:ext>
+            </a:extLst>
+          </p:cNvPr>
+          <p:cNvSpPr>
+            <a:spLocks noGrp="1"/>
+          </p:cNvSpPr>
+          <p:nvPr>
+            <p:ph idx="1"/>
+          </p:nvPr>
+        </p:nvSpPr>
+        <p:spPr/>
+        <p:txBody>
+          <a:bodyPr/>
+          <a:lstStyle/>
+          <a:p>
+            <a:r>
+              <a:rPr lang="ja-JP" altLang="ja-JP" dirty="0"/>
+              <a:t>掛け金を用い、勝ち負けで</a:t>
+            </a:r>
+            <a:r>
+              <a:rPr lang="ja-JP" altLang="en-US" dirty="0"/>
+              <a:t>持ち金</a:t>
+            </a:r>
+            <a:r>
+              <a:rPr lang="ja-JP" altLang="ja-JP" dirty="0"/>
+              <a:t>が増減するようなものを作</a:t>
+            </a:r>
+            <a:r>
+              <a:rPr lang="ja-JP" altLang="en-US" dirty="0"/>
+              <a:t>る</a:t>
+            </a:r>
+            <a:endParaRPr lang="en-US" altLang="ja-JP" dirty="0"/>
+          </a:p>
+          <a:p>
+            <a:endParaRPr lang="en-US" altLang="ja-JP" dirty="0"/>
+          </a:p>
+          <a:p>
+            <a:r>
+              <a:rPr lang="ja-JP" altLang="ja-JP" dirty="0"/>
+              <a:t>データベースを用いてランキング</a:t>
+            </a:r>
+            <a:r>
+              <a:rPr lang="ja-JP" altLang="en-US" dirty="0"/>
+              <a:t>を作る</a:t>
+            </a:r>
+            <a:endParaRPr lang="en-US" altLang="ja-JP" dirty="0"/>
+          </a:p>
+          <a:p>
+            <a:pPr marL="0" indent="0">
+              <a:buNone/>
+            </a:pPr>
+            <a:r>
+              <a:rPr lang="ja-JP" altLang="en-US" dirty="0"/>
+              <a:t>→</a:t>
+            </a:r>
+            <a:r>
+              <a:rPr lang="en-US" altLang="ja-JP" dirty="0" err="1"/>
+              <a:t>supabase</a:t>
+            </a:r>
+            <a:r>
+              <a:rPr lang="ja-JP" altLang="en-US"/>
+              <a:t>というサービスを使う</a:t>
+            </a:r>
+            <a:endParaRPr lang="ja-JP" altLang="ja-JP" dirty="0"/>
+          </a:p>
+        </p:txBody>
+      </p:sp>
+    </p:spTree>
+    <p:extLst>
+      <p:ext uri="{BB962C8B-B14F-4D97-AF65-F5344CB8AC3E}">
+        <p14:creationId xmlns:p14="http://schemas.microsoft.com/office/powerpoint/2010/main" val="2621622928"/>
       </p:ext>
     </p:extLst>
   </p:cSld>

--- a/モバイル開発実習_数あてゲームプレゼン資料.pptx
+++ b/モバイル開発実習_数あてゲームプレゼン資料.pptx
@@ -12,6 +12,7 @@
     <p:sldId id="260" r:id="rId6"/>
     <p:sldId id="261" r:id="rId7"/>
     <p:sldId id="262" r:id="rId8"/>
+    <p:sldId id="263" r:id="rId9"/>
   </p:sldIdLst>
   <p:sldSz cx="12192000" cy="6858000"/>
   <p:notesSz cx="6858000" cy="9144000"/>
@@ -265,7 +266,7 @@
           <a:p>
             <a:fld id="{68004F82-E079-488E-B351-25DDCF2C8407}" type="datetimeFigureOut">
               <a:rPr kumimoji="1" lang="ja-JP" altLang="en-US" smtClean="0"/>
-              <a:t>2026/5/13</a:t>
+              <a:t>2026/5/20</a:t>
             </a:fld>
             <a:endParaRPr kumimoji="1" lang="ja-JP" altLang="en-US"/>
           </a:p>
@@ -495,7 +496,7 @@
           <a:p>
             <a:fld id="{68004F82-E079-488E-B351-25DDCF2C8407}" type="datetimeFigureOut">
               <a:rPr kumimoji="1" lang="ja-JP" altLang="en-US" smtClean="0"/>
-              <a:t>2026/5/13</a:t>
+              <a:t>2026/5/20</a:t>
             </a:fld>
             <a:endParaRPr kumimoji="1" lang="ja-JP" altLang="en-US"/>
           </a:p>
@@ -735,7 +736,7 @@
           <a:p>
             <a:fld id="{68004F82-E079-488E-B351-25DDCF2C8407}" type="datetimeFigureOut">
               <a:rPr kumimoji="1" lang="ja-JP" altLang="en-US" smtClean="0"/>
-              <a:t>2026/5/13</a:t>
+              <a:t>2026/5/20</a:t>
             </a:fld>
             <a:endParaRPr kumimoji="1" lang="ja-JP" altLang="en-US"/>
           </a:p>
@@ -965,7 +966,7 @@
           <a:p>
             <a:fld id="{68004F82-E079-488E-B351-25DDCF2C8407}" type="datetimeFigureOut">
               <a:rPr kumimoji="1" lang="ja-JP" altLang="en-US" smtClean="0"/>
-              <a:t>2026/5/13</a:t>
+              <a:t>2026/5/20</a:t>
             </a:fld>
             <a:endParaRPr kumimoji="1" lang="ja-JP" altLang="en-US"/>
           </a:p>
@@ -1240,7 +1241,7 @@
           <a:p>
             <a:fld id="{68004F82-E079-488E-B351-25DDCF2C8407}" type="datetimeFigureOut">
               <a:rPr kumimoji="1" lang="ja-JP" altLang="en-US" smtClean="0"/>
-              <a:t>2026/5/13</a:t>
+              <a:t>2026/5/20</a:t>
             </a:fld>
             <a:endParaRPr kumimoji="1" lang="ja-JP" altLang="en-US"/>
           </a:p>
@@ -1569,7 +1570,7 @@
           <a:p>
             <a:fld id="{68004F82-E079-488E-B351-25DDCF2C8407}" type="datetimeFigureOut">
               <a:rPr kumimoji="1" lang="ja-JP" altLang="en-US" smtClean="0"/>
-              <a:t>2026/5/13</a:t>
+              <a:t>2026/5/20</a:t>
             </a:fld>
             <a:endParaRPr kumimoji="1" lang="ja-JP" altLang="en-US"/>
           </a:p>
@@ -2045,7 +2046,7 @@
           <a:p>
             <a:fld id="{68004F82-E079-488E-B351-25DDCF2C8407}" type="datetimeFigureOut">
               <a:rPr kumimoji="1" lang="ja-JP" altLang="en-US" smtClean="0"/>
-              <a:t>2026/5/13</a:t>
+              <a:t>2026/5/20</a:t>
             </a:fld>
             <a:endParaRPr kumimoji="1" lang="ja-JP" altLang="en-US"/>
           </a:p>
@@ -2186,7 +2187,7 @@
           <a:p>
             <a:fld id="{68004F82-E079-488E-B351-25DDCF2C8407}" type="datetimeFigureOut">
               <a:rPr kumimoji="1" lang="ja-JP" altLang="en-US" smtClean="0"/>
-              <a:t>2026/5/13</a:t>
+              <a:t>2026/5/20</a:t>
             </a:fld>
             <a:endParaRPr kumimoji="1" lang="ja-JP" altLang="en-US"/>
           </a:p>
@@ -2299,7 +2300,7 @@
           <a:p>
             <a:fld id="{68004F82-E079-488E-B351-25DDCF2C8407}" type="datetimeFigureOut">
               <a:rPr kumimoji="1" lang="ja-JP" altLang="en-US" smtClean="0"/>
-              <a:t>2026/5/13</a:t>
+              <a:t>2026/5/20</a:t>
             </a:fld>
             <a:endParaRPr kumimoji="1" lang="ja-JP" altLang="en-US"/>
           </a:p>
@@ -2642,7 +2643,7 @@
           <a:p>
             <a:fld id="{68004F82-E079-488E-B351-25DDCF2C8407}" type="datetimeFigureOut">
               <a:rPr kumimoji="1" lang="ja-JP" altLang="en-US" smtClean="0"/>
-              <a:t>2026/5/13</a:t>
+              <a:t>2026/5/20</a:t>
             </a:fld>
             <a:endParaRPr kumimoji="1" lang="ja-JP" altLang="en-US"/>
           </a:p>
@@ -2930,7 +2931,7 @@
           <a:p>
             <a:fld id="{68004F82-E079-488E-B351-25DDCF2C8407}" type="datetimeFigureOut">
               <a:rPr kumimoji="1" lang="ja-JP" altLang="en-US" smtClean="0"/>
-              <a:t>2026/5/13</a:t>
+              <a:t>2026/5/20</a:t>
             </a:fld>
             <a:endParaRPr kumimoji="1" lang="ja-JP" altLang="en-US"/>
           </a:p>
@@ -3203,7 +3204,7 @@
           <a:p>
             <a:fld id="{68004F82-E079-488E-B351-25DDCF2C8407}" type="datetimeFigureOut">
               <a:rPr kumimoji="1" lang="ja-JP" altLang="en-US" smtClean="0"/>
-              <a:t>2026/5/13</a:t>
+              <a:t>2026/5/20</a:t>
             </a:fld>
             <a:endParaRPr kumimoji="1" lang="ja-JP" altLang="en-US"/>
           </a:p>
@@ -4433,6 +4434,119 @@
     <p:extLst>
       <p:ext uri="{BB962C8B-B14F-4D97-AF65-F5344CB8AC3E}">
         <p14:creationId xmlns:p14="http://schemas.microsoft.com/office/powerpoint/2010/main" val="2621622928"/>
+      </p:ext>
+    </p:extLst>
+  </p:cSld>
+  <p:clrMapOvr>
+    <a:masterClrMapping/>
+  </p:clrMapOvr>
+</p:sld>
+</file>
+
+<file path=ppt/slides/slide8.xml><?xml version="1.0" encoding="utf-8"?>
+<p:sld xmlns:a="http://schemas.openxmlformats.org/drawingml/2006/main" xmlns:r="http://schemas.openxmlformats.org/officeDocument/2006/relationships" xmlns:p="http://schemas.openxmlformats.org/presentationml/2006/main">
+  <p:cSld>
+    <p:spTree>
+      <p:nvGrpSpPr>
+        <p:cNvPr id="1" name=""/>
+        <p:cNvGrpSpPr/>
+        <p:nvPr/>
+      </p:nvGrpSpPr>
+      <p:grpSpPr>
+        <a:xfrm>
+          <a:off x="0" y="0"/>
+          <a:ext cx="0" cy="0"/>
+          <a:chOff x="0" y="0"/>
+          <a:chExt cx="0" cy="0"/>
+        </a:xfrm>
+      </p:grpSpPr>
+      <p:sp>
+        <p:nvSpPr>
+          <p:cNvPr id="2" name="タイトル 1">
+            <a:extLst>
+              <a:ext uri="{FF2B5EF4-FFF2-40B4-BE49-F238E27FC236}">
+                <a16:creationId xmlns:a16="http://schemas.microsoft.com/office/drawing/2014/main" id="{2A103450-648A-54CE-3920-33A5D74DC5F1}"/>
+              </a:ext>
+            </a:extLst>
+          </p:cNvPr>
+          <p:cNvSpPr>
+            <a:spLocks noGrp="1"/>
+          </p:cNvSpPr>
+          <p:nvPr>
+            <p:ph type="title"/>
+          </p:nvPr>
+        </p:nvSpPr>
+        <p:spPr/>
+        <p:txBody>
+          <a:bodyPr/>
+          <a:lstStyle/>
+          <a:p>
+            <a:r>
+              <a:rPr kumimoji="1" lang="ja-JP" altLang="en-US" dirty="0"/>
+              <a:t>開発環境</a:t>
+            </a:r>
+          </a:p>
+        </p:txBody>
+      </p:sp>
+      <p:sp>
+        <p:nvSpPr>
+          <p:cNvPr id="3" name="コンテンツ プレースホルダー 2">
+            <a:extLst>
+              <a:ext uri="{FF2B5EF4-FFF2-40B4-BE49-F238E27FC236}">
+                <a16:creationId xmlns:a16="http://schemas.microsoft.com/office/drawing/2014/main" id="{168D447E-D6EE-1CB6-805D-77557004E9B2}"/>
+              </a:ext>
+            </a:extLst>
+          </p:cNvPr>
+          <p:cNvSpPr>
+            <a:spLocks noGrp="1"/>
+          </p:cNvSpPr>
+          <p:nvPr>
+            <p:ph idx="1"/>
+          </p:nvPr>
+        </p:nvSpPr>
+        <p:spPr/>
+        <p:txBody>
+          <a:bodyPr/>
+          <a:lstStyle/>
+          <a:p>
+            <a:r>
+              <a:rPr kumimoji="1" lang="en-US" altLang="ja-JP" dirty="0" err="1"/>
+              <a:t>Vscode</a:t>
+            </a:r>
+            <a:r>
+              <a:rPr kumimoji="1" lang="en-US" altLang="ja-JP" dirty="0"/>
+              <a:t> 1.119.0</a:t>
+            </a:r>
+          </a:p>
+          <a:p>
+            <a:r>
+              <a:rPr lang="en-US" altLang="ja-JP" dirty="0"/>
+              <a:t>Android SDK 36.0.0</a:t>
+            </a:r>
+          </a:p>
+          <a:p>
+            <a:r>
+              <a:rPr kumimoji="1" lang="en-US" altLang="ja-JP" dirty="0"/>
+              <a:t>Flutter 3.35.6</a:t>
+            </a:r>
+          </a:p>
+          <a:p>
+            <a:r>
+              <a:rPr kumimoji="1" lang="en-US" altLang="ja-JP" dirty="0"/>
+              <a:t>D</a:t>
+            </a:r>
+            <a:r>
+              <a:rPr lang="en-US" altLang="ja-JP" dirty="0"/>
+              <a:t>art 3.9.2</a:t>
+            </a:r>
+            <a:endParaRPr kumimoji="1" lang="ja-JP" altLang="en-US" dirty="0"/>
+          </a:p>
+        </p:txBody>
+      </p:sp>
+    </p:spTree>
+    <p:extLst>
+      <p:ext uri="{BB962C8B-B14F-4D97-AF65-F5344CB8AC3E}">
+        <p14:creationId xmlns:p14="http://schemas.microsoft.com/office/powerpoint/2010/main" val="1116656267"/>
       </p:ext>
     </p:extLst>
   </p:cSld>
